--- a/media/module5/slides.pptx
+++ b/media/module5/slides.pptx
@@ -3109,8 +3109,8 @@
         </p:nvSpPr>
         <p:spPr>
           <a:xfrm>
-            <a:off x="548640" y="2011680"/>
-            <a:ext cx="11064240" cy="2286000"/>
+            <a:off x="548640" y="1828800"/>
+            <a:ext cx="11064240" cy="2743200"/>
           </a:xfrm>
           <a:prstGeom prst="rect">
             <a:avLst/>
@@ -3119,15 +3119,22 @@
         </p:spPr>
         <p:txBody>
           <a:bodyPr wrap="square">
-            <a:spAutoFit/>
+            <a:noAutofit/>
           </a:bodyPr>
           <a:lstStyle/>
           <a:p>
             <a:pPr algn="ctr">
-              <a:defRPr sz="4400" b="1">
+              <a:lnSpc>
+                <a:spcPts val="2200"/>
+              </a:lnSpc>
+              <a:spcAft>
+                <a:spcPts val="400"/>
+              </a:spcAft>
+              <a:defRPr sz="4000" b="1">
                 <a:solidFill>
                   <a:srgbClr val="1A1A2E"/>
                 </a:solidFill>
+                <a:latin typeface="Calibri"/>
               </a:defRPr>
             </a:pPr>
             <a:r>
@@ -3136,13 +3143,17 @@
           </a:p>
           <a:p>
             <a:pPr algn="ctr">
+              <a:lnSpc>
+                <a:spcPts val="2200"/>
+              </a:lnSpc>
               <a:spcBef>
-                <a:spcPts val="1200"/>
+                <a:spcPts val="1400"/>
               </a:spcBef>
-              <a:defRPr sz="3200">
+              <a:defRPr sz="2600" b="0">
                 <a:solidFill>
                   <a:srgbClr val="333333"/>
                 </a:solidFill>
+                <a:latin typeface="Calibri"/>
               </a:defRPr>
             </a:pPr>
             <a:r>
@@ -3168,16 +3179,20 @@
           <a:noFill/>
         </p:spPr>
         <p:txBody>
-          <a:bodyPr wrap="none">
-            <a:spAutoFit/>
+          <a:bodyPr wrap="square">
+            <a:noAutofit/>
           </a:bodyPr>
           <a:lstStyle/>
           <a:p>
             <a:pPr algn="r">
-              <a:defRPr sz="1000">
+              <a:lnSpc>
+                <a:spcPts val="2200"/>
+              </a:lnSpc>
+              <a:defRPr sz="1000" b="0">
                 <a:solidFill>
                   <a:srgbClr val="666666"/>
                 </a:solidFill>
+                <a:latin typeface="Calibri"/>
               </a:defRPr>
             </a:pPr>
             <a:r>
@@ -3212,8 +3227,8 @@
         </p:nvSpPr>
         <p:spPr>
           <a:xfrm>
-            <a:off x="548640" y="457200"/>
-            <a:ext cx="11064240" cy="731520"/>
+            <a:off x="548640" y="411480"/>
+            <a:ext cx="11064240" cy="777240"/>
           </a:xfrm>
           <a:prstGeom prst="rect">
             <a:avLst/>
@@ -3221,16 +3236,20 @@
           <a:noFill/>
         </p:spPr>
         <p:txBody>
-          <a:bodyPr wrap="none">
-            <a:spAutoFit/>
+          <a:bodyPr wrap="square">
+            <a:noAutofit/>
           </a:bodyPr>
           <a:lstStyle/>
           <a:p>
             <a:pPr>
-              <a:defRPr sz="3200" b="1">
+              <a:lnSpc>
+                <a:spcPts val="2200"/>
+              </a:lnSpc>
+              <a:defRPr sz="2800" b="1">
                 <a:solidFill>
                   <a:srgbClr val="1A1A2E"/>
                 </a:solidFill>
+                <a:latin typeface="Calibri"/>
               </a:defRPr>
             </a:pPr>
             <a:r>
@@ -3247,27 +3266,57 @@
         </p:nvSpPr>
         <p:spPr>
           <a:xfrm>
-            <a:off x="548640" y="1143000"/>
-            <a:ext cx="11064240" cy="548640"/>
+            <a:off x="548640" y="1051560"/>
+            <a:ext cx="11064240" cy="914400"/>
           </a:xfrm>
           <a:prstGeom prst="rect">
             <a:avLst/>
           </a:prstGeom>
-          <a:noFill/>
-        </p:spPr>
-        <p:txBody>
-          <a:bodyPr wrap="none">
-            <a:spAutoFit/>
+          <a:solidFill>
+            <a:srgbClr val="F4F4F4"/>
+          </a:solidFill>
+        </p:spPr>
+        <p:txBody>
+          <a:bodyPr wrap="square">
+            <a:noAutofit/>
           </a:bodyPr>
           <a:lstStyle/>
           <a:p>
             <a:pPr>
-              <a:defRPr sz="1400">
+              <a:lnSpc>
+                <a:spcPts val="2200"/>
+              </a:lnSpc>
+              <a:spcAft>
+                <a:spcPts val="200"/>
+              </a:spcAft>
+              <a:defRPr sz="2000" b="0">
+                <a:solidFill>
+                  <a:srgbClr val="333333"/>
+                </a:solidFill>
                 <a:latin typeface="Consolas"/>
               </a:defRPr>
             </a:pPr>
             <a:r>
-              <a:t>$ cd module5/examples/tar_archives &amp;&amp; tar czf /tmp/m5_demo.tar.gz demo_dir/ &amp;&amp; tar tzf /tmp/m5_demo.tar.gz | head -5</a:t>
+              <a:t>$ cd module5/examples/tar_archives &amp;&amp; tar czf /tmp/m5_demo.tar.gz</a:t>
+            </a:r>
+          </a:p>
+          <a:p>
+            <a:pPr>
+              <a:lnSpc>
+                <a:spcPts val="2200"/>
+              </a:lnSpc>
+              <a:spcAft>
+                <a:spcPts val="200"/>
+              </a:spcAft>
+              <a:defRPr sz="2000" b="0">
+                <a:solidFill>
+                  <a:srgbClr val="333333"/>
+                </a:solidFill>
+                <a:latin typeface="Consolas"/>
+              </a:defRPr>
+            </a:pPr>
+            <a:r>
+              <a:t>      demo_dir/ &amp;&amp; tar tzf /tmp/m5_demo.tar.gz | head -5</a:t>
             </a:r>
           </a:p>
         </p:txBody>
@@ -3288,8 +3337,8 @@
         </p:blipFill>
         <p:spPr>
           <a:xfrm>
-            <a:off x="548640" y="1828800"/>
-            <a:ext cx="11064240" cy="3840480"/>
+            <a:off x="548640" y="1965960"/>
+            <a:ext cx="7071358" cy="3977639"/>
           </a:xfrm>
           <a:prstGeom prst="rect">
             <a:avLst/>
@@ -3313,16 +3362,20 @@
           <a:noFill/>
         </p:spPr>
         <p:txBody>
-          <a:bodyPr wrap="none">
-            <a:spAutoFit/>
+          <a:bodyPr wrap="square">
+            <a:noAutofit/>
           </a:bodyPr>
           <a:lstStyle/>
           <a:p>
             <a:pPr algn="r">
-              <a:defRPr sz="1000">
+              <a:lnSpc>
+                <a:spcPts val="2200"/>
+              </a:lnSpc>
+              <a:defRPr sz="1000" b="0">
                 <a:solidFill>
                   <a:srgbClr val="666666"/>
                 </a:solidFill>
+                <a:latin typeface="Calibri"/>
               </a:defRPr>
             </a:pPr>
             <a:r>
@@ -3366,13 +3419,21 @@
           <a:noFill/>
         </p:spPr>
         <p:txBody>
-          <a:bodyPr wrap="none">
-            <a:spAutoFit/>
+          <a:bodyPr wrap="square">
+            <a:noAutofit/>
           </a:bodyPr>
           <a:lstStyle/>
           <a:p>
             <a:pPr algn="ctr">
-              <a:defRPr sz="4000" b="1"/>
+              <a:lnSpc>
+                <a:spcPts val="2200"/>
+              </a:lnSpc>
+              <a:defRPr sz="3600" b="1">
+                <a:solidFill>
+                  <a:srgbClr val="1A1A2E"/>
+                </a:solidFill>
+                <a:latin typeface="Calibri"/>
+              </a:defRPr>
             </a:pPr>
             <a:r>
               <a:t>Practice</a:t>
@@ -3397,16 +3458,20 @@
           <a:noFill/>
         </p:spPr>
         <p:txBody>
-          <a:bodyPr wrap="none">
-            <a:spAutoFit/>
+          <a:bodyPr wrap="square">
+            <a:noAutofit/>
           </a:bodyPr>
           <a:lstStyle/>
           <a:p>
             <a:pPr algn="r">
-              <a:defRPr sz="1000">
+              <a:lnSpc>
+                <a:spcPts val="2200"/>
+              </a:lnSpc>
+              <a:defRPr sz="1000" b="0">
                 <a:solidFill>
                   <a:srgbClr val="666666"/>
                 </a:solidFill>
+                <a:latin typeface="Calibri"/>
               </a:defRPr>
             </a:pPr>
             <a:r>
@@ -3441,8 +3506,8 @@
         </p:nvSpPr>
         <p:spPr>
           <a:xfrm>
-            <a:off x="548640" y="457200"/>
-            <a:ext cx="11064240" cy="731520"/>
+            <a:off x="548640" y="411480"/>
+            <a:ext cx="11064240" cy="777240"/>
           </a:xfrm>
           <a:prstGeom prst="rect">
             <a:avLst/>
@@ -3450,16 +3515,20 @@
           <a:noFill/>
         </p:spPr>
         <p:txBody>
-          <a:bodyPr wrap="none">
-            <a:spAutoFit/>
+          <a:bodyPr wrap="square">
+            <a:noAutofit/>
           </a:bodyPr>
           <a:lstStyle/>
           <a:p>
             <a:pPr>
-              <a:defRPr sz="3200" b="1">
+              <a:lnSpc>
+                <a:spcPts val="2200"/>
+              </a:lnSpc>
+              <a:defRPr sz="2800" b="1">
                 <a:solidFill>
                   <a:srgbClr val="1A1A2E"/>
                 </a:solidFill>
+                <a:latin typeface="Calibri"/>
               </a:defRPr>
             </a:pPr>
             <a:r>
@@ -3476,7 +3545,7 @@
         </p:nvSpPr>
         <p:spPr>
           <a:xfrm>
-            <a:off x="548640" y="1234440"/>
+            <a:off x="548640" y="1143000"/>
             <a:ext cx="11064240" cy="5029200"/>
           </a:xfrm>
           <a:prstGeom prst="rect">
@@ -3488,12 +3557,18 @@
         </p:spPr>
         <p:txBody>
           <a:bodyPr wrap="square">
-            <a:spAutoFit/>
+            <a:noAutofit/>
           </a:bodyPr>
           <a:lstStyle/>
           <a:p>
             <a:pPr>
-              <a:defRPr sz="1400">
+              <a:lnSpc>
+                <a:spcPts val="2200"/>
+              </a:lnSpc>
+              <a:spcAft>
+                <a:spcPts val="400"/>
+              </a:spcAft>
+              <a:defRPr sz="2000" b="0">
                 <a:solidFill>
                   <a:srgbClr val="333333"/>
                 </a:solidFill>
@@ -3523,16 +3598,20 @@
           <a:noFill/>
         </p:spPr>
         <p:txBody>
-          <a:bodyPr wrap="none">
-            <a:spAutoFit/>
+          <a:bodyPr wrap="square">
+            <a:noAutofit/>
           </a:bodyPr>
           <a:lstStyle/>
           <a:p>
             <a:pPr algn="r">
-              <a:defRPr sz="1000">
+              <a:lnSpc>
+                <a:spcPts val="2200"/>
+              </a:lnSpc>
+              <a:defRPr sz="1000" b="0">
                 <a:solidFill>
                   <a:srgbClr val="666666"/>
                 </a:solidFill>
+                <a:latin typeface="Calibri"/>
               </a:defRPr>
             </a:pPr>
             <a:r>
@@ -3567,8 +3646,8 @@
         </p:nvSpPr>
         <p:spPr>
           <a:xfrm>
-            <a:off x="548640" y="457200"/>
-            <a:ext cx="11064240" cy="731520"/>
+            <a:off x="548640" y="411480"/>
+            <a:ext cx="11064240" cy="777240"/>
           </a:xfrm>
           <a:prstGeom prst="rect">
             <a:avLst/>
@@ -3576,16 +3655,20 @@
           <a:noFill/>
         </p:spPr>
         <p:txBody>
-          <a:bodyPr wrap="none">
-            <a:spAutoFit/>
+          <a:bodyPr wrap="square">
+            <a:noAutofit/>
           </a:bodyPr>
           <a:lstStyle/>
           <a:p>
             <a:pPr>
-              <a:defRPr sz="3200" b="1">
+              <a:lnSpc>
+                <a:spcPts val="2200"/>
+              </a:lnSpc>
+              <a:defRPr sz="2800" b="1">
                 <a:solidFill>
                   <a:srgbClr val="1A1A2E"/>
                 </a:solidFill>
+                <a:latin typeface="Calibri"/>
               </a:defRPr>
             </a:pPr>
             <a:r>
@@ -3602,8 +3685,8 @@
         </p:nvSpPr>
         <p:spPr>
           <a:xfrm>
-            <a:off x="548640" y="1280160"/>
-            <a:ext cx="11064240" cy="4754880"/>
+            <a:off x="548640" y="1234440"/>
+            <a:ext cx="11064240" cy="4937760"/>
           </a:xfrm>
           <a:prstGeom prst="rect">
             <a:avLst/>
@@ -3612,52 +3695,64 @@
         </p:spPr>
         <p:txBody>
           <a:bodyPr wrap="square">
-            <a:spAutoFit/>
+            <a:noAutofit/>
           </a:bodyPr>
           <a:lstStyle/>
           <a:p>
             <a:pPr>
+              <a:lnSpc>
+                <a:spcPts val="2200"/>
+              </a:lnSpc>
               <a:spcAft>
-                <a:spcPts val="800"/>
+                <a:spcPts val="1000"/>
               </a:spcAft>
-              <a:defRPr sz="2000">
+              <a:defRPr sz="2000" b="0">
                 <a:solidFill>
                   <a:srgbClr val="333333"/>
                 </a:solidFill>
+                <a:latin typeface="Calibri"/>
               </a:defRPr>
             </a:pPr>
             <a:r>
-              <a:t>Scaffold unix_course_project/</a:t>
+              <a:t>• Scaffold unix_course_project/</a:t>
             </a:r>
           </a:p>
           <a:p>
             <a:pPr>
+              <a:lnSpc>
+                <a:spcPts val="2200"/>
+              </a:lnSpc>
               <a:spcAft>
-                <a:spcPts val="800"/>
+                <a:spcPts val="1000"/>
               </a:spcAft>
-              <a:defRPr sz="2000">
+              <a:defRPr sz="2000" b="0">
                 <a:solidFill>
                   <a:srgbClr val="333333"/>
                 </a:solidFill>
+                <a:latin typeface="Calibri"/>
               </a:defRPr>
             </a:pPr>
             <a:r>
-              <a:t>grep -R in sample_project</a:t>
+              <a:t>• grep -R in sample_project</a:t>
             </a:r>
           </a:p>
           <a:p>
             <a:pPr>
+              <a:lnSpc>
+                <a:spcPts val="2200"/>
+              </a:lnSpc>
               <a:spcAft>
-                <a:spcPts val="800"/>
+                <a:spcPts val="1000"/>
               </a:spcAft>
-              <a:defRPr sz="2000">
+              <a:defRPr sz="2000" b="0">
                 <a:solidFill>
                   <a:srgbClr val="333333"/>
                 </a:solidFill>
+                <a:latin typeface="Calibri"/>
               </a:defRPr>
             </a:pPr>
             <a:r>
-              <a:t>Create a tar.gz backup</a:t>
+              <a:t>• Create a tar.gz backup</a:t>
             </a:r>
           </a:p>
         </p:txBody>
@@ -3679,16 +3774,20 @@
           <a:noFill/>
         </p:spPr>
         <p:txBody>
-          <a:bodyPr wrap="none">
-            <a:spAutoFit/>
+          <a:bodyPr wrap="square">
+            <a:noAutofit/>
           </a:bodyPr>
           <a:lstStyle/>
           <a:p>
             <a:pPr algn="r">
-              <a:defRPr sz="1000">
+              <a:lnSpc>
+                <a:spcPts val="2200"/>
+              </a:lnSpc>
+              <a:defRPr sz="1000" b="0">
                 <a:solidFill>
                   <a:srgbClr val="666666"/>
                 </a:solidFill>
+                <a:latin typeface="Calibri"/>
               </a:defRPr>
             </a:pPr>
             <a:r>
@@ -3723,8 +3822,8 @@
         </p:nvSpPr>
         <p:spPr>
           <a:xfrm>
-            <a:off x="548640" y="457200"/>
-            <a:ext cx="11064240" cy="731520"/>
+            <a:off x="548640" y="411480"/>
+            <a:ext cx="11064240" cy="777240"/>
           </a:xfrm>
           <a:prstGeom prst="rect">
             <a:avLst/>
@@ -3732,16 +3831,20 @@
           <a:noFill/>
         </p:spPr>
         <p:txBody>
-          <a:bodyPr wrap="none">
-            <a:spAutoFit/>
+          <a:bodyPr wrap="square">
+            <a:noAutofit/>
           </a:bodyPr>
           <a:lstStyle/>
           <a:p>
             <a:pPr>
-              <a:defRPr sz="3200" b="1">
+              <a:lnSpc>
+                <a:spcPts val="2200"/>
+              </a:lnSpc>
+              <a:defRPr sz="2800" b="1">
                 <a:solidFill>
                   <a:srgbClr val="1A1A2E"/>
                 </a:solidFill>
+                <a:latin typeface="Calibri"/>
               </a:defRPr>
             </a:pPr>
             <a:r>
@@ -3758,8 +3861,8 @@
         </p:nvSpPr>
         <p:spPr>
           <a:xfrm>
-            <a:off x="548640" y="1280160"/>
-            <a:ext cx="11064240" cy="4754880"/>
+            <a:off x="548640" y="1234440"/>
+            <a:ext cx="11064240" cy="4937760"/>
           </a:xfrm>
           <a:prstGeom prst="rect">
             <a:avLst/>
@@ -3768,67 +3871,83 @@
         </p:spPr>
         <p:txBody>
           <a:bodyPr wrap="square">
-            <a:spAutoFit/>
+            <a:noAutofit/>
           </a:bodyPr>
           <a:lstStyle/>
           <a:p>
             <a:pPr>
+              <a:lnSpc>
+                <a:spcPts val="2200"/>
+              </a:lnSpc>
               <a:spcAft>
-                <a:spcPts val="800"/>
+                <a:spcPts val="1000"/>
               </a:spcAft>
-              <a:defRPr sz="2000">
+              <a:defRPr sz="2000" b="0">
                 <a:solidFill>
                   <a:srgbClr val="333333"/>
                 </a:solidFill>
+                <a:latin typeface="Calibri"/>
               </a:defRPr>
             </a:pPr>
             <a:r>
-              <a:t>Organize src/tb/scripts/build</a:t>
+              <a:t>• Organize src/tb/scripts/build</a:t>
             </a:r>
           </a:p>
           <a:p>
             <a:pPr>
+              <a:lnSpc>
+                <a:spcPts val="2200"/>
+              </a:lnSpc>
               <a:spcAft>
-                <a:spcPts val="800"/>
+                <a:spcPts val="1000"/>
               </a:spcAft>
-              <a:defRPr sz="2000">
+              <a:defRPr sz="2000" b="0">
                 <a:solidFill>
                   <a:srgbClr val="333333"/>
                 </a:solidFill>
+                <a:latin typeface="Calibri"/>
               </a:defRPr>
             </a:pPr>
             <a:r>
-              <a:t>Archives for sharing</a:t>
+              <a:t>• Archives for sharing</a:t>
             </a:r>
           </a:p>
           <a:p>
             <a:pPr>
+              <a:lnSpc>
+                <a:spcPts val="2200"/>
+              </a:lnSpc>
               <a:spcAft>
-                <a:spcPts val="800"/>
+                <a:spcPts val="1000"/>
               </a:spcAft>
-              <a:defRPr sz="2000">
+              <a:defRPr sz="2000" b="0">
                 <a:solidFill>
                   <a:srgbClr val="333333"/>
                 </a:solidFill>
+                <a:latin typeface="Calibri"/>
               </a:defRPr>
             </a:pPr>
             <a:r>
-              <a:t>Next: Module 6 — Git basics</a:t>
+              <a:t>• Next: Module 6 — Git basics</a:t>
             </a:r>
           </a:p>
           <a:p>
             <a:pPr>
+              <a:lnSpc>
+                <a:spcPts val="2200"/>
+              </a:lnSpc>
               <a:spcAft>
-                <a:spcPts val="800"/>
+                <a:spcPts val="1000"/>
               </a:spcAft>
-              <a:defRPr sz="2000">
+              <a:defRPr sz="2000" b="0">
                 <a:solidFill>
                   <a:srgbClr val="333333"/>
                 </a:solidFill>
+                <a:latin typeface="Calibri"/>
               </a:defRPr>
             </a:pPr>
             <a:r>
-              <a:t>Next: Module 6: Git Basics for Course Work</a:t>
+              <a:t>• Next: Module 6: Git Basics for Course Work</a:t>
             </a:r>
           </a:p>
         </p:txBody>
@@ -3850,16 +3969,20 @@
           <a:noFill/>
         </p:spPr>
         <p:txBody>
-          <a:bodyPr wrap="none">
-            <a:spAutoFit/>
+          <a:bodyPr wrap="square">
+            <a:noAutofit/>
           </a:bodyPr>
           <a:lstStyle/>
           <a:p>
             <a:pPr algn="r">
-              <a:defRPr sz="1000">
+              <a:lnSpc>
+                <a:spcPts val="2200"/>
+              </a:lnSpc>
+              <a:defRPr sz="1000" b="0">
                 <a:solidFill>
                   <a:srgbClr val="666666"/>
                 </a:solidFill>
+                <a:latin typeface="Calibri"/>
               </a:defRPr>
             </a:pPr>
             <a:r>
@@ -3894,8 +4017,8 @@
         </p:nvSpPr>
         <p:spPr>
           <a:xfrm>
-            <a:off x="548640" y="457200"/>
-            <a:ext cx="11064240" cy="731520"/>
+            <a:off x="548640" y="411480"/>
+            <a:ext cx="11064240" cy="777240"/>
           </a:xfrm>
           <a:prstGeom prst="rect">
             <a:avLst/>
@@ -3903,16 +4026,20 @@
           <a:noFill/>
         </p:spPr>
         <p:txBody>
-          <a:bodyPr wrap="none">
-            <a:spAutoFit/>
+          <a:bodyPr wrap="square">
+            <a:noAutofit/>
           </a:bodyPr>
           <a:lstStyle/>
           <a:p>
             <a:pPr>
-              <a:defRPr sz="3200" b="1">
+              <a:lnSpc>
+                <a:spcPts val="2200"/>
+              </a:lnSpc>
+              <a:defRPr sz="2800" b="1">
                 <a:solidFill>
                   <a:srgbClr val="1A1A2E"/>
                 </a:solidFill>
+                <a:latin typeface="Calibri"/>
               </a:defRPr>
             </a:pPr>
             <a:r>
@@ -3929,8 +4056,8 @@
         </p:nvSpPr>
         <p:spPr>
           <a:xfrm>
-            <a:off x="548640" y="1280160"/>
-            <a:ext cx="11064240" cy="4754880"/>
+            <a:off x="548640" y="1234440"/>
+            <a:ext cx="11064240" cy="4937760"/>
           </a:xfrm>
           <a:prstGeom prst="rect">
             <a:avLst/>
@@ -3939,67 +4066,83 @@
         </p:spPr>
         <p:txBody>
           <a:bodyPr wrap="square">
-            <a:spAutoFit/>
+            <a:noAutofit/>
           </a:bodyPr>
           <a:lstStyle/>
           <a:p>
             <a:pPr>
+              <a:lnSpc>
+                <a:spcPts val="2200"/>
+              </a:lnSpc>
               <a:spcAft>
-                <a:spcPts val="800"/>
+                <a:spcPts val="1000"/>
               </a:spcAft>
-              <a:defRPr sz="2000">
+              <a:defRPr sz="2000" b="0">
                 <a:solidFill>
                   <a:srgbClr val="333333"/>
                 </a:solidFill>
+                <a:latin typeface="Calibri"/>
               </a:defRPr>
             </a:pPr>
             <a:r>
-              <a:t>Use a consistent src/tb/scripts/build layout</a:t>
+              <a:t>• Use a consistent src/tb/scripts/build layout</a:t>
             </a:r>
           </a:p>
           <a:p>
             <a:pPr>
+              <a:lnSpc>
+                <a:spcPts val="2200"/>
+              </a:lnSpc>
               <a:spcAft>
-                <a:spcPts val="800"/>
+                <a:spcPts val="1000"/>
               </a:spcAft>
-              <a:defRPr sz="2000">
+              <a:defRPr sz="2000" b="0">
                 <a:solidFill>
                   <a:srgbClr val="333333"/>
                 </a:solidFill>
+                <a:latin typeface="Calibri"/>
               </a:defRPr>
             </a:pPr>
             <a:r>
-              <a:t>Find files and search with grep -R</a:t>
+              <a:t>• Find files and search with grep -R</a:t>
             </a:r>
           </a:p>
           <a:p>
             <a:pPr>
+              <a:lnSpc>
+                <a:spcPts val="2200"/>
+              </a:lnSpc>
               <a:spcAft>
-                <a:spcPts val="800"/>
+                <a:spcPts val="1000"/>
               </a:spcAft>
-              <a:defRPr sz="2000">
+              <a:defRPr sz="2000" b="0">
                 <a:solidFill>
                   <a:srgbClr val="333333"/>
                 </a:solidFill>
+                <a:latin typeface="Calibri"/>
               </a:defRPr>
             </a:pPr>
             <a:r>
-              <a:t>Create and extract tar.gz archives</a:t>
+              <a:t>• Create and extract tar.gz archives</a:t>
             </a:r>
           </a:p>
           <a:p>
             <a:pPr>
+              <a:lnSpc>
+                <a:spcPts val="2200"/>
+              </a:lnSpc>
               <a:spcAft>
-                <a:spcPts val="800"/>
+                <a:spcPts val="1000"/>
               </a:spcAft>
-              <a:defRPr sz="2000">
+              <a:defRPr sz="2000" b="0">
                 <a:solidFill>
                   <a:srgbClr val="333333"/>
                 </a:solidFill>
+                <a:latin typeface="Calibri"/>
               </a:defRPr>
             </a:pPr>
             <a:r>
-              <a:t>Back up projects before major changes</a:t>
+              <a:t>• Back up projects before major changes</a:t>
             </a:r>
           </a:p>
         </p:txBody>
@@ -4021,16 +4164,20 @@
           <a:noFill/>
         </p:spPr>
         <p:txBody>
-          <a:bodyPr wrap="none">
-            <a:spAutoFit/>
+          <a:bodyPr wrap="square">
+            <a:noAutofit/>
           </a:bodyPr>
           <a:lstStyle/>
           <a:p>
             <a:pPr algn="r">
-              <a:defRPr sz="1000">
+              <a:lnSpc>
+                <a:spcPts val="2200"/>
+              </a:lnSpc>
+              <a:defRPr sz="1000" b="0">
                 <a:solidFill>
                   <a:srgbClr val="666666"/>
                 </a:solidFill>
+                <a:latin typeface="Calibri"/>
               </a:defRPr>
             </a:pPr>
             <a:r>
@@ -4065,8 +4212,8 @@
         </p:nvSpPr>
         <p:spPr>
           <a:xfrm>
-            <a:off x="548640" y="457200"/>
-            <a:ext cx="11064240" cy="731520"/>
+            <a:off x="548640" y="411480"/>
+            <a:ext cx="11064240" cy="777240"/>
           </a:xfrm>
           <a:prstGeom prst="rect">
             <a:avLst/>
@@ -4074,16 +4221,20 @@
           <a:noFill/>
         </p:spPr>
         <p:txBody>
-          <a:bodyPr wrap="none">
-            <a:spAutoFit/>
+          <a:bodyPr wrap="square">
+            <a:noAutofit/>
           </a:bodyPr>
           <a:lstStyle/>
           <a:p>
             <a:pPr>
-              <a:defRPr sz="3200" b="1">
+              <a:lnSpc>
+                <a:spcPts val="2200"/>
+              </a:lnSpc>
+              <a:defRPr sz="2800" b="1">
                 <a:solidFill>
                   <a:srgbClr val="1A1A2E"/>
                 </a:solidFill>
+                <a:latin typeface="Calibri"/>
               </a:defRPr>
             </a:pPr>
             <a:r>
@@ -4100,8 +4251,8 @@
         </p:nvSpPr>
         <p:spPr>
           <a:xfrm>
-            <a:off x="548640" y="1280160"/>
-            <a:ext cx="11064240" cy="4754880"/>
+            <a:off x="548640" y="1234440"/>
+            <a:ext cx="11064240" cy="4937760"/>
           </a:xfrm>
           <a:prstGeom prst="rect">
             <a:avLst/>
@@ -4110,22 +4261,26 @@
         </p:spPr>
         <p:txBody>
           <a:bodyPr wrap="square">
-            <a:spAutoFit/>
+            <a:noAutofit/>
           </a:bodyPr>
           <a:lstStyle/>
           <a:p>
             <a:pPr>
+              <a:lnSpc>
+                <a:spcPts val="2200"/>
+              </a:lnSpc>
               <a:spcAft>
-                <a:spcPts val="800"/>
+                <a:spcPts val="1000"/>
               </a:spcAft>
-              <a:defRPr sz="2000">
+              <a:defRPr sz="2000" b="0">
                 <a:solidFill>
                   <a:srgbClr val="333333"/>
                 </a:solidFill>
+                <a:latin typeface="Calibri"/>
               </a:defRPr>
             </a:pPr>
             <a:r>
-              <a:t>Module 4 (basic scripts)</a:t>
+              <a:t>• Module 4 (basic scripts)</a:t>
             </a:r>
           </a:p>
         </p:txBody>
@@ -4147,16 +4302,20 @@
           <a:noFill/>
         </p:spPr>
         <p:txBody>
-          <a:bodyPr wrap="none">
-            <a:spAutoFit/>
+          <a:bodyPr wrap="square">
+            <a:noAutofit/>
           </a:bodyPr>
           <a:lstStyle/>
           <a:p>
             <a:pPr algn="r">
-              <a:defRPr sz="1000">
+              <a:lnSpc>
+                <a:spcPts val="2200"/>
+              </a:lnSpc>
+              <a:defRPr sz="1000" b="0">
                 <a:solidFill>
                   <a:srgbClr val="666666"/>
                 </a:solidFill>
+                <a:latin typeface="Calibri"/>
               </a:defRPr>
             </a:pPr>
             <a:r>
@@ -4191,8 +4350,8 @@
         </p:nvSpPr>
         <p:spPr>
           <a:xfrm>
-            <a:off x="548640" y="457200"/>
-            <a:ext cx="11064240" cy="731520"/>
+            <a:off x="548640" y="411480"/>
+            <a:ext cx="11064240" cy="777240"/>
           </a:xfrm>
           <a:prstGeom prst="rect">
             <a:avLst/>
@@ -4200,16 +4359,20 @@
           <a:noFill/>
         </p:spPr>
         <p:txBody>
-          <a:bodyPr wrap="none">
-            <a:spAutoFit/>
+          <a:bodyPr wrap="square">
+            <a:noAutofit/>
           </a:bodyPr>
           <a:lstStyle/>
           <a:p>
             <a:pPr>
-              <a:defRPr sz="3200" b="1">
+              <a:lnSpc>
+                <a:spcPts val="2200"/>
+              </a:lnSpc>
+              <a:defRPr sz="2800" b="1">
                 <a:solidFill>
                   <a:srgbClr val="1A1A2E"/>
                 </a:solidFill>
+                <a:latin typeface="Calibri"/>
               </a:defRPr>
             </a:pPr>
             <a:r>
@@ -4234,8 +4397,8 @@
         </p:blipFill>
         <p:spPr>
           <a:xfrm>
-            <a:off x="548640" y="1234440"/>
-            <a:ext cx="11064240" cy="4389120"/>
+            <a:off x="548640" y="1143000"/>
+            <a:ext cx="8128000" cy="4572000"/>
           </a:xfrm>
           <a:prstGeom prst="rect">
             <a:avLst/>
@@ -4259,16 +4422,20 @@
           <a:noFill/>
         </p:spPr>
         <p:txBody>
-          <a:bodyPr wrap="none">
-            <a:spAutoFit/>
+          <a:bodyPr wrap="square">
+            <a:noAutofit/>
           </a:bodyPr>
           <a:lstStyle/>
           <a:p>
             <a:pPr algn="r">
-              <a:defRPr sz="1000">
+              <a:lnSpc>
+                <a:spcPts val="2200"/>
+              </a:lnSpc>
+              <a:defRPr sz="1000" b="0">
                 <a:solidFill>
                   <a:srgbClr val="666666"/>
                 </a:solidFill>
+                <a:latin typeface="Calibri"/>
               </a:defRPr>
             </a:pPr>
             <a:r>
@@ -4303,8 +4470,8 @@
         </p:nvSpPr>
         <p:spPr>
           <a:xfrm>
-            <a:off x="548640" y="457200"/>
-            <a:ext cx="11064240" cy="731520"/>
+            <a:off x="548640" y="411480"/>
+            <a:ext cx="11064240" cy="777240"/>
           </a:xfrm>
           <a:prstGeom prst="rect">
             <a:avLst/>
@@ -4312,16 +4479,20 @@
           <a:noFill/>
         </p:spPr>
         <p:txBody>
-          <a:bodyPr wrap="none">
-            <a:spAutoFit/>
+          <a:bodyPr wrap="square">
+            <a:noAutofit/>
           </a:bodyPr>
           <a:lstStyle/>
           <a:p>
             <a:pPr>
-              <a:defRPr sz="3200" b="1">
+              <a:lnSpc>
+                <a:spcPts val="2200"/>
+              </a:lnSpc>
+              <a:defRPr sz="2800" b="1">
                 <a:solidFill>
                   <a:srgbClr val="1A1A2E"/>
                 </a:solidFill>
+                <a:latin typeface="Calibri"/>
               </a:defRPr>
             </a:pPr>
             <a:r>
@@ -4338,8 +4509,8 @@
         </p:nvSpPr>
         <p:spPr>
           <a:xfrm>
-            <a:off x="548640" y="1280160"/>
-            <a:ext cx="11064240" cy="4754880"/>
+            <a:off x="548640" y="1234440"/>
+            <a:ext cx="11064240" cy="4937760"/>
           </a:xfrm>
           <a:prstGeom prst="rect">
             <a:avLst/>
@@ -4348,52 +4519,64 @@
         </p:spPr>
         <p:txBody>
           <a:bodyPr wrap="square">
-            <a:spAutoFit/>
+            <a:noAutofit/>
           </a:bodyPr>
           <a:lstStyle/>
           <a:p>
             <a:pPr>
+              <a:lnSpc>
+                <a:spcPts val="2200"/>
+              </a:lnSpc>
               <a:spcAft>
-                <a:spcPts val="800"/>
+                <a:spcPts val="1000"/>
               </a:spcAft>
-              <a:defRPr sz="2000">
+              <a:defRPr sz="2000" b="0">
                 <a:solidFill>
                   <a:srgbClr val="333333"/>
                 </a:solidFill>
+                <a:latin typeface="Calibri"/>
               </a:defRPr>
             </a:pPr>
             <a:r>
-              <a:t>RTL projects mirror course repo structure</a:t>
+              <a:t>• RTL projects mirror course repo structure</a:t>
             </a:r>
           </a:p>
           <a:p>
             <a:pPr>
+              <a:lnSpc>
+                <a:spcPts val="2200"/>
+              </a:lnSpc>
               <a:spcAft>
-                <a:spcPts val="800"/>
+                <a:spcPts val="1000"/>
               </a:spcAft>
-              <a:defRPr sz="2000">
+              <a:defRPr sz="2000" b="0">
                 <a:solidFill>
                   <a:srgbClr val="333333"/>
                 </a:solidFill>
+                <a:latin typeface="Calibri"/>
               </a:defRPr>
             </a:pPr>
             <a:r>
-              <a:t>Exclude build/ from archives and Git</a:t>
+              <a:t>• Exclude build/ from archives and Git</a:t>
             </a:r>
           </a:p>
           <a:p>
             <a:pPr>
+              <a:lnSpc>
+                <a:spcPts val="2200"/>
+              </a:lnSpc>
               <a:spcAft>
-                <a:spcPts val="800"/>
+                <a:spcPts val="1000"/>
               </a:spcAft>
-              <a:defRPr sz="2000">
+              <a:defRPr sz="2000" b="0">
                 <a:solidFill>
                   <a:srgbClr val="333333"/>
                 </a:solidFill>
+                <a:latin typeface="Calibri"/>
               </a:defRPr>
             </a:pPr>
             <a:r>
-              <a:t>grep -R finds signals across a tree</a:t>
+              <a:t>• grep -R finds signals across a tree</a:t>
             </a:r>
           </a:p>
         </p:txBody>
@@ -4415,16 +4598,20 @@
           <a:noFill/>
         </p:spPr>
         <p:txBody>
-          <a:bodyPr wrap="none">
-            <a:spAutoFit/>
+          <a:bodyPr wrap="square">
+            <a:noAutofit/>
           </a:bodyPr>
           <a:lstStyle/>
           <a:p>
             <a:pPr algn="r">
-              <a:defRPr sz="1000">
+              <a:lnSpc>
+                <a:spcPts val="2200"/>
+              </a:lnSpc>
+              <a:defRPr sz="1000" b="0">
                 <a:solidFill>
                   <a:srgbClr val="666666"/>
                 </a:solidFill>
+                <a:latin typeface="Calibri"/>
               </a:defRPr>
             </a:pPr>
             <a:r>
@@ -4468,13 +4655,21 @@
           <a:noFill/>
         </p:spPr>
         <p:txBody>
-          <a:bodyPr wrap="none">
-            <a:spAutoFit/>
+          <a:bodyPr wrap="square">
+            <a:noAutofit/>
           </a:bodyPr>
           <a:lstStyle/>
           <a:p>
             <a:pPr algn="ctr">
-              <a:defRPr sz="4000" b="1"/>
+              <a:lnSpc>
+                <a:spcPts val="2200"/>
+              </a:lnSpc>
+              <a:defRPr sz="3600" b="1">
+                <a:solidFill>
+                  <a:srgbClr val="1A1A2E"/>
+                </a:solidFill>
+                <a:latin typeface="Calibri"/>
+              </a:defRPr>
             </a:pPr>
             <a:r>
               <a:t>Core topics</a:t>
@@ -4499,16 +4694,20 @@
           <a:noFill/>
         </p:spPr>
         <p:txBody>
-          <a:bodyPr wrap="none">
-            <a:spAutoFit/>
+          <a:bodyPr wrap="square">
+            <a:noAutofit/>
           </a:bodyPr>
           <a:lstStyle/>
           <a:p>
             <a:pPr algn="r">
-              <a:defRPr sz="1000">
+              <a:lnSpc>
+                <a:spcPts val="2200"/>
+              </a:lnSpc>
+              <a:defRPr sz="1000" b="0">
                 <a:solidFill>
                   <a:srgbClr val="666666"/>
                 </a:solidFill>
+                <a:latin typeface="Calibri"/>
               </a:defRPr>
             </a:pPr>
             <a:r>
@@ -4543,8 +4742,8 @@
         </p:nvSpPr>
         <p:spPr>
           <a:xfrm>
-            <a:off x="548640" y="457200"/>
-            <a:ext cx="11064240" cy="731520"/>
+            <a:off x="548640" y="411480"/>
+            <a:ext cx="11064240" cy="777240"/>
           </a:xfrm>
           <a:prstGeom prst="rect">
             <a:avLst/>
@@ -4552,16 +4751,20 @@
           <a:noFill/>
         </p:spPr>
         <p:txBody>
-          <a:bodyPr wrap="none">
-            <a:spAutoFit/>
+          <a:bodyPr wrap="square">
+            <a:noAutofit/>
           </a:bodyPr>
           <a:lstStyle/>
           <a:p>
             <a:pPr>
-              <a:defRPr sz="3200" b="1">
+              <a:lnSpc>
+                <a:spcPts val="2200"/>
+              </a:lnSpc>
+              <a:defRPr sz="2800" b="1">
                 <a:solidFill>
                   <a:srgbClr val="1A1A2E"/>
                 </a:solidFill>
+                <a:latin typeface="Calibri"/>
               </a:defRPr>
             </a:pPr>
             <a:r>
@@ -4578,22 +4781,33 @@
         </p:nvSpPr>
         <p:spPr>
           <a:xfrm>
-            <a:off x="548640" y="1143000"/>
-            <a:ext cx="11064240" cy="548640"/>
+            <a:off x="548640" y="1051560"/>
+            <a:ext cx="11064240" cy="914400"/>
           </a:xfrm>
           <a:prstGeom prst="rect">
             <a:avLst/>
           </a:prstGeom>
-          <a:noFill/>
-        </p:spPr>
-        <p:txBody>
-          <a:bodyPr wrap="none">
-            <a:spAutoFit/>
+          <a:solidFill>
+            <a:srgbClr val="F4F4F4"/>
+          </a:solidFill>
+        </p:spPr>
+        <p:txBody>
+          <a:bodyPr wrap="square">
+            <a:noAutofit/>
           </a:bodyPr>
           <a:lstStyle/>
           <a:p>
             <a:pPr>
-              <a:defRPr sz="1400">
+              <a:lnSpc>
+                <a:spcPts val="2200"/>
+              </a:lnSpc>
+              <a:spcAft>
+                <a:spcPts val="200"/>
+              </a:spcAft>
+              <a:defRPr sz="2000" b="0">
+                <a:solidFill>
+                  <a:srgbClr val="333333"/>
+                </a:solidFill>
                 <a:latin typeface="Consolas"/>
               </a:defRPr>
             </a:pPr>
@@ -4619,8 +4833,8 @@
         </p:blipFill>
         <p:spPr>
           <a:xfrm>
-            <a:off x="548640" y="1828800"/>
-            <a:ext cx="11064240" cy="3840480"/>
+            <a:off x="548640" y="1965960"/>
+            <a:ext cx="7071358" cy="3977639"/>
           </a:xfrm>
           <a:prstGeom prst="rect">
             <a:avLst/>
@@ -4644,16 +4858,20 @@
           <a:noFill/>
         </p:spPr>
         <p:txBody>
-          <a:bodyPr wrap="none">
-            <a:spAutoFit/>
+          <a:bodyPr wrap="square">
+            <a:noAutofit/>
           </a:bodyPr>
           <a:lstStyle/>
           <a:p>
             <a:pPr algn="r">
-              <a:defRPr sz="1000">
+              <a:lnSpc>
+                <a:spcPts val="2200"/>
+              </a:lnSpc>
+              <a:defRPr sz="1000" b="0">
                 <a:solidFill>
                   <a:srgbClr val="666666"/>
                 </a:solidFill>
+                <a:latin typeface="Calibri"/>
               </a:defRPr>
             </a:pPr>
             <a:r>
@@ -4688,8 +4906,8 @@
         </p:nvSpPr>
         <p:spPr>
           <a:xfrm>
-            <a:off x="548640" y="457200"/>
-            <a:ext cx="11064240" cy="731520"/>
+            <a:off x="548640" y="411480"/>
+            <a:ext cx="11064240" cy="777240"/>
           </a:xfrm>
           <a:prstGeom prst="rect">
             <a:avLst/>
@@ -4697,16 +4915,20 @@
           <a:noFill/>
         </p:spPr>
         <p:txBody>
-          <a:bodyPr wrap="none">
-            <a:spAutoFit/>
+          <a:bodyPr wrap="square">
+            <a:noAutofit/>
           </a:bodyPr>
           <a:lstStyle/>
           <a:p>
             <a:pPr>
-              <a:defRPr sz="3200" b="1">
+              <a:lnSpc>
+                <a:spcPts val="2200"/>
+              </a:lnSpc>
+              <a:defRPr sz="2800" b="1">
                 <a:solidFill>
                   <a:srgbClr val="1A1A2E"/>
                 </a:solidFill>
+                <a:latin typeface="Calibri"/>
               </a:defRPr>
             </a:pPr>
             <a:r>
@@ -4723,7 +4945,7 @@
         </p:nvSpPr>
         <p:spPr>
           <a:xfrm>
-            <a:off x="548640" y="1234440"/>
+            <a:off x="548640" y="1143000"/>
             <a:ext cx="11064240" cy="5029200"/>
           </a:xfrm>
           <a:prstGeom prst="rect">
@@ -4735,12 +4957,18 @@
         </p:spPr>
         <p:txBody>
           <a:bodyPr wrap="square">
-            <a:spAutoFit/>
+            <a:noAutofit/>
           </a:bodyPr>
           <a:lstStyle/>
           <a:p>
             <a:pPr>
-              <a:defRPr sz="1400">
+              <a:lnSpc>
+                <a:spcPts val="2200"/>
+              </a:lnSpc>
+              <a:spcAft>
+                <a:spcPts val="400"/>
+              </a:spcAft>
+              <a:defRPr sz="2000" b="0">
                 <a:solidFill>
                   <a:srgbClr val="333333"/>
                 </a:solidFill>
@@ -4750,7 +4978,22 @@
             <a:r>
               <a:t>tar czf project_$(date +%Y%m%d).tar.gz project_dir/</a:t>
             </a:r>
-            <a:br/>
+          </a:p>
+          <a:p>
+            <a:pPr>
+              <a:lnSpc>
+                <a:spcPts val="2200"/>
+              </a:lnSpc>
+              <a:spcAft>
+                <a:spcPts val="400"/>
+              </a:spcAft>
+              <a:defRPr sz="2000" b="0">
+                <a:solidFill>
+                  <a:srgbClr val="333333"/>
+                </a:solidFill>
+                <a:latin typeface="Consolas"/>
+              </a:defRPr>
+            </a:pPr>
             <a:r>
               <a:t>tar xzf project.tar.gz</a:t>
             </a:r>
@@ -4774,16 +5017,20 @@
           <a:noFill/>
         </p:spPr>
         <p:txBody>
-          <a:bodyPr wrap="none">
-            <a:spAutoFit/>
+          <a:bodyPr wrap="square">
+            <a:noAutofit/>
           </a:bodyPr>
           <a:lstStyle/>
           <a:p>
             <a:pPr algn="r">
-              <a:defRPr sz="1000">
+              <a:lnSpc>
+                <a:spcPts val="2200"/>
+              </a:lnSpc>
+              <a:defRPr sz="1000" b="0">
                 <a:solidFill>
                   <a:srgbClr val="666666"/>
                 </a:solidFill>
+                <a:latin typeface="Calibri"/>
               </a:defRPr>
             </a:pPr>
             <a:r>
@@ -4818,8 +5065,8 @@
         </p:nvSpPr>
         <p:spPr>
           <a:xfrm>
-            <a:off x="548640" y="457200"/>
-            <a:ext cx="11064240" cy="731520"/>
+            <a:off x="548640" y="411480"/>
+            <a:ext cx="11064240" cy="777240"/>
           </a:xfrm>
           <a:prstGeom prst="rect">
             <a:avLst/>
@@ -4827,16 +5074,20 @@
           <a:noFill/>
         </p:spPr>
         <p:txBody>
-          <a:bodyPr wrap="none">
-            <a:spAutoFit/>
+          <a:bodyPr wrap="square">
+            <a:noAutofit/>
           </a:bodyPr>
           <a:lstStyle/>
           <a:p>
             <a:pPr>
-              <a:defRPr sz="3200" b="1">
+              <a:lnSpc>
+                <a:spcPts val="2200"/>
+              </a:lnSpc>
+              <a:defRPr sz="2800" b="1">
                 <a:solidFill>
                   <a:srgbClr val="1A1A2E"/>
                 </a:solidFill>
+                <a:latin typeface="Calibri"/>
               </a:defRPr>
             </a:pPr>
             <a:r>
@@ -4853,27 +5104,57 @@
         </p:nvSpPr>
         <p:spPr>
           <a:xfrm>
-            <a:off x="548640" y="1143000"/>
-            <a:ext cx="11064240" cy="548640"/>
+            <a:off x="548640" y="1051560"/>
+            <a:ext cx="11064240" cy="914400"/>
           </a:xfrm>
           <a:prstGeom prst="rect">
             <a:avLst/>
           </a:prstGeom>
-          <a:noFill/>
-        </p:spPr>
-        <p:txBody>
-          <a:bodyPr wrap="none">
-            <a:spAutoFit/>
+          <a:solidFill>
+            <a:srgbClr val="F4F4F4"/>
+          </a:solidFill>
+        </p:spPr>
+        <p:txBody>
+          <a:bodyPr wrap="square">
+            <a:noAutofit/>
           </a:bodyPr>
           <a:lstStyle/>
           <a:p>
             <a:pPr>
-              <a:defRPr sz="1400">
+              <a:lnSpc>
+                <a:spcPts val="2200"/>
+              </a:lnSpc>
+              <a:spcAft>
+                <a:spcPts val="200"/>
+              </a:spcAft>
+              <a:defRPr sz="2000" b="0">
+                <a:solidFill>
+                  <a:srgbClr val="333333"/>
+                </a:solidFill>
                 <a:latin typeface="Consolas"/>
               </a:defRPr>
             </a:pPr>
             <a:r>
-              <a:t>$ cd module5/examples/project_structure/sample_project &amp;&amp; find . -type f | head -8</a:t>
+              <a:t>$ cd module5/examples/project_structure/sample_project &amp;&amp; find . -type</a:t>
+            </a:r>
+          </a:p>
+          <a:p>
+            <a:pPr>
+              <a:lnSpc>
+                <a:spcPts val="2200"/>
+              </a:lnSpc>
+              <a:spcAft>
+                <a:spcPts val="200"/>
+              </a:spcAft>
+              <a:defRPr sz="2000" b="0">
+                <a:solidFill>
+                  <a:srgbClr val="333333"/>
+                </a:solidFill>
+                <a:latin typeface="Consolas"/>
+              </a:defRPr>
+            </a:pPr>
+            <a:r>
+              <a:t>      f | head -8</a:t>
             </a:r>
           </a:p>
         </p:txBody>
@@ -4894,8 +5175,8 @@
         </p:blipFill>
         <p:spPr>
           <a:xfrm>
-            <a:off x="548640" y="1828800"/>
-            <a:ext cx="11064240" cy="3840480"/>
+            <a:off x="548640" y="1965960"/>
+            <a:ext cx="7071358" cy="3977639"/>
           </a:xfrm>
           <a:prstGeom prst="rect">
             <a:avLst/>
@@ -4919,16 +5200,20 @@
           <a:noFill/>
         </p:spPr>
         <p:txBody>
-          <a:bodyPr wrap="none">
-            <a:spAutoFit/>
+          <a:bodyPr wrap="square">
+            <a:noAutofit/>
           </a:bodyPr>
           <a:lstStyle/>
           <a:p>
             <a:pPr algn="r">
-              <a:defRPr sz="1000">
+              <a:lnSpc>
+                <a:spcPts val="2200"/>
+              </a:lnSpc>
+              <a:defRPr sz="1000" b="0">
                 <a:solidFill>
                   <a:srgbClr val="666666"/>
                 </a:solidFill>
+                <a:latin typeface="Calibri"/>
               </a:defRPr>
             </a:pPr>
             <a:r>
